--- a/media/exports/reports/2025-11/calls.pptx
+++ b/media/exports/reports/2025-11/calls.pptx
@@ -235,25 +235,25 @@
                 <c:formatCode>#,##0;[Red](#,##0)</c:formatCode>
                 <c:ptCount val="7"/>
                 <c:pt idx="0">
-                  <c:v>66</c:v>
+                  <c:v>68</c:v>
                 </c:pt>
                 <c:pt idx="1">
-                  <c:v>123</c:v>
+                  <c:v>148</c:v>
                 </c:pt>
                 <c:pt idx="2">
-                  <c:v>102</c:v>
+                  <c:v>121</c:v>
                 </c:pt>
                 <c:pt idx="3">
-                  <c:v>88</c:v>
+                  <c:v>98</c:v>
                 </c:pt>
                 <c:pt idx="4">
-                  <c:v>98</c:v>
+                  <c:v>118</c:v>
                 </c:pt>
                 <c:pt idx="5">
-                  <c:v>85</c:v>
+                  <c:v>78</c:v>
                 </c:pt>
                 <c:pt idx="6">
-                  <c:v>113</c:v>
+                  <c:v>115</c:v>
                 </c:pt>
               </c:numCache>
             </c:numRef>
@@ -317,7 +317,7 @@
       <c:valAx>
         <c:axId val="-2113994440"/>
         <c:scaling>
-          <c:max val="141.45"/>
+          <c:max val="170.2"/>
           <c:min val="0.0"/>
         </c:scaling>
         <c:delete/>
@@ -453,46 +453,46 @@
                 <c:formatCode>#,##0;[Red](#,##0)</c:formatCode>
                 <c:ptCount val="14"/>
                 <c:pt idx="0">
-                  <c:v>659</c:v>
+                  <c:v>685</c:v>
                 </c:pt>
                 <c:pt idx="1">
-                  <c:v>655</c:v>
+                  <c:v>633</c:v>
                 </c:pt>
                 <c:pt idx="2">
+                  <c:v>684</c:v>
+                </c:pt>
+                <c:pt idx="3">
+                  <c:v>690</c:v>
+                </c:pt>
+                <c:pt idx="4">
+                  <c:v>664</c:v>
+                </c:pt>
+                <c:pt idx="5">
                   <c:v>685</c:v>
                 </c:pt>
-                <c:pt idx="3">
-                  <c:v>714</c:v>
-                </c:pt>
-                <c:pt idx="4">
-                  <c:v>683</c:v>
-                </c:pt>
-                <c:pt idx="5">
-                  <c:v>725</c:v>
-                </c:pt>
                 <c:pt idx="6">
-                  <c:v>620</c:v>
+                  <c:v>629</c:v>
                 </c:pt>
                 <c:pt idx="7">
-                  <c:v>754</c:v>
+                  <c:v>724</c:v>
                 </c:pt>
                 <c:pt idx="8">
-                  <c:v>783</c:v>
+                  <c:v>820</c:v>
                 </c:pt>
                 <c:pt idx="9">
-                  <c:v>871</c:v>
+                  <c:v>909</c:v>
                 </c:pt>
                 <c:pt idx="10">
-                  <c:v>852</c:v>
+                  <c:v>826</c:v>
                 </c:pt>
                 <c:pt idx="11">
-                  <c:v>781</c:v>
+                  <c:v>756</c:v>
                 </c:pt>
                 <c:pt idx="12">
-                  <c:v>792</c:v>
+                  <c:v>770</c:v>
                 </c:pt>
                 <c:pt idx="13">
-                  <c:v>675</c:v>
+                  <c:v>746</c:v>
                 </c:pt>
               </c:numCache>
             </c:numRef>
@@ -1066,7 +1066,7 @@
           <a:lstStyle/>
           <a:p>
             <a:r>
-              <a:t>When do calls for help come in, and are we there to answer?. Calls for help, November: 675; Answered while staffed, November: 82.9%; Calls outside staffed hours, November: 52.4%; Median wait when answered, November: 76 sec. 675 calls for help came in during November. While the line was staffed, 82.9% were answered (target 90.0%); 52.4% of all calls came outside staffed hours and went to voicemail. The busiest time was 5 to 8pm (123 calls). 123 calls came between 5 and 8pm, when no-one is on the line. 55 callers hung up waiting while the line was staffed.</a:t>
+              <a:t>When do calls for help come in, and are we there to answer?. Calls for help, November: 746; Answered while staffed, November: 83.2%; Calls outside staffed hours, November: 52.1%; Median wait when answered, November: 76 sec. 746 calls for help came in during November. While the line was staffed, 83.2% were answered (target 90.0%); 52.1% of all calls came outside staffed hours and went to voicemail. The busiest time was 5 to 8pm (148 calls). 148 calls came between 5 and 8pm, when no-one is on the line. 60 callers hung up waiting while the line was staffed.</a:t>
             </a:r>
           </a:p>
         </p:txBody>
@@ -4551,7 +4551,7 @@
                 </a:solidFill>
                 <a:latin typeface="Roboto"/>
               </a:rPr>
-              <a:t>Data retrieved 2pm, Tue 6 Oct 2026 · Generated 8 Oct 2026, 6:42pm · Sample data · Made with Python (python-pptx)</a:t>
+              <a:t>Data retrieved 2pm, Tue 6 Oct 2026 · Generated 8 Oct 2026, 11:41pm · Sample data · Made with Python (python-pptx)</a:t>
             </a:r>
           </a:p>
         </p:txBody>
@@ -4897,7 +4897,7 @@
                 </a:solidFill>
                 <a:latin typeface="Roboto"/>
               </a:rPr>
-              <a:t>675</a:t>
+              <a:t>746</a:t>
             </a:r>
           </a:p>
         </p:txBody>
@@ -4936,7 +4936,7 @@
                 </a:solidFill>
                 <a:latin typeface="Roboto"/>
               </a:rPr>
-              <a:t>October 792</a:t>
+              <a:t>October 770</a:t>
             </a:r>
           </a:p>
         </p:txBody>
@@ -5063,7 +5063,7 @@
                 </a:solidFill>
                 <a:latin typeface="Roboto"/>
               </a:rPr>
-              <a:t>82.9%</a:t>
+              <a:t>83.2%</a:t>
             </a:r>
           </a:p>
         </p:txBody>
@@ -5229,7 +5229,7 @@
                 </a:solidFill>
                 <a:latin typeface="Roboto"/>
               </a:rPr>
-              <a:t>52.4%</a:t>
+              <a:t>52.1%</a:t>
             </a:r>
           </a:p>
         </p:txBody>
@@ -5268,7 +5268,7 @@
                 </a:solidFill>
                 <a:latin typeface="Roboto"/>
               </a:rPr>
-              <a:t>354 calls to voicemail</a:t>
+              <a:t>389 calls to voicemail</a:t>
             </a:r>
           </a:p>
         </p:txBody>
@@ -5434,7 +5434,7 @@
                 </a:solidFill>
                 <a:latin typeface="Roboto"/>
               </a:rPr>
-              <a:t>266 answered calls</a:t>
+              <a:t>297 answered calls</a:t>
             </a:r>
           </a:p>
         </p:txBody>
@@ -5579,7 +5579,7 @@
                 </a:solidFill>
                 <a:latin typeface="Roboto"/>
               </a:rPr>
-              <a:t>675 calls for help came in during November. While the line was staffed, 82.9% were answered (target 90.0%); 52.4% of all calls came outside staffed hours and went to voicemail. The busiest time was 5 to 8pm (123 calls).</a:t>
+              <a:t>746 calls for help came in during November. While the line was staffed, 83.2% were answered (target 90.0%); 52.1% of all calls came outside staffed hours and went to voicemail. The busiest time was 5 to 8pm (148 calls).</a:t>
             </a:r>
           </a:p>
         </p:txBody>
@@ -5706,7 +5706,7 @@
                 </a:solidFill>
                 <a:latin typeface="Roboto"/>
               </a:rPr>
-              <a:t>123 calls came between 5 and 8pm, when no-one is on the line. 55 callers hung up waiting while the line was staffed.</a:t>
+              <a:t>148 calls came between 5 and 8pm, when no-one is on the line. 60 callers hung up waiting while the line was staffed.</a:t>
             </a:r>
           </a:p>
         </p:txBody>
@@ -5784,7 +5784,7 @@
                 </a:solidFill>
                 <a:latin typeface="Roboto"/>
               </a:rPr>
-              <a:t>Data retrieved 2pm, Tue 6 Oct 2026 · Generated 8 Oct 2026, 6:42pm · Sample data · Made with Python (python-pptx)</a:t>
+              <a:t>Data retrieved 2pm, Tue 6 Oct 2026 · Generated 8 Oct 2026, 11:41pm · Sample data · Made with Python (python-pptx)</a:t>
             </a:r>
           </a:p>
         </p:txBody>
@@ -6099,7 +6099,7 @@
                 </a:solidFill>
                 <a:latin typeface="Roboto"/>
               </a:rPr>
-              <a:t>Data retrieved 2pm, Tue 6 Oct 2026 · Generated 8 Oct 2026, 6:42pm · Sample data · Made with Python (python-pptx)</a:t>
+              <a:t>Data retrieved 2pm, Tue 6 Oct 2026 · Generated 8 Oct 2026, 11:41pm · Sample data · Made with Python (python-pptx)</a:t>
             </a:r>
           </a:p>
         </p:txBody>

--- a/media/exports/reports/2025-11/calls.pptx
+++ b/media/exports/reports/2025-11/calls.pptx
@@ -996,7 +996,7 @@
           <a:lstStyle/>
           <a:p>
             <a:r>
-              <a:t>When do calls for help come in, and are we there to answer?. Sample Community Services Ltd. Period: November 2025. Every call to the help line: when it came in, whether someone answered, and how long the caller waited. The line is staffed 8:30am to 5pm on working days.</a:t>
+              <a:t>When do calls for help come in, and are we there to answer?. Sample Community Services Ltd. Period: November 2025. In short: 746 calls in November: 83.2% answered while staffed (target 90.0%); 52.1% came outside staffed hours. Every call to the help line: when it came in, whether someone answered, and how long the caller waited. The line is staffed 8:30am to 5pm on working days.</a:t>
             </a:r>
           </a:p>
         </p:txBody>
@@ -4361,7 +4361,7 @@
         <p:spPr>
           <a:xfrm>
             <a:off x="457200" y="3703320"/>
-            <a:ext cx="11277295" cy="535940"/>
+            <a:ext cx="11277295" cy="758190"/>
           </a:xfrm>
           <a:prstGeom prst="rect">
             <a:avLst/>
@@ -4386,7 +4386,7 @@
                 </a:solidFill>
                 <a:latin typeface="Roboto"/>
               </a:rPr>
-              <a:t>Period: November 2025. Every call to the help line: when it came in, whether someone answered, and how long the caller waited. The line is staffed 8:30am to 5pm on working days.</a:t>
+              <a:t>Period: November 2025. In short: 746 calls in November: 83.2% answered while staffed (target 90.0%); 52.1% came outside staffed hours. Every call to the help line: when it came in, whether someone answered, and how long the caller waited. The line is staffed 8:30am to 5pm on working days.</a:t>
             </a:r>
           </a:p>
         </p:txBody>
@@ -4399,7 +4399,7 @@
         </p:nvSpPr>
         <p:spPr>
           <a:xfrm>
-            <a:off x="457200" y="4330700"/>
+            <a:off x="457200" y="4552950"/>
             <a:ext cx="11277295" cy="1097280"/>
           </a:xfrm>
           <a:prstGeom prst="rect">
@@ -4551,7 +4551,7 @@
                 </a:solidFill>
                 <a:latin typeface="Roboto"/>
               </a:rPr>
-              <a:t>Data retrieved 2pm, Tue 6 Oct 2026 · Generated 8 Oct 2026, 11:41pm · Sample data · Made with Python (python-pptx)</a:t>
+              <a:t>Data retrieved 2pm, Tue 6 Oct 2026 · Generated 10 Oct 2026, 9:55pm · Sample data · Made with Python (python-pptx)</a:t>
             </a:r>
           </a:p>
         </p:txBody>
@@ -5784,7 +5784,7 @@
                 </a:solidFill>
                 <a:latin typeface="Roboto"/>
               </a:rPr>
-              <a:t>Data retrieved 2pm, Tue 6 Oct 2026 · Generated 8 Oct 2026, 11:41pm · Sample data · Made with Python (python-pptx)</a:t>
+              <a:t>Data retrieved 2pm, Tue 6 Oct 2026 · Generated 10 Oct 2026, 9:55pm · Sample data · Made with Python (python-pptx)</a:t>
             </a:r>
           </a:p>
         </p:txBody>
@@ -6099,7 +6099,7 @@
                 </a:solidFill>
                 <a:latin typeface="Roboto"/>
               </a:rPr>
-              <a:t>Data retrieved 2pm, Tue 6 Oct 2026 · Generated 8 Oct 2026, 11:41pm · Sample data · Made with Python (python-pptx)</a:t>
+              <a:t>Data retrieved 2pm, Tue 6 Oct 2026 · Generated 10 Oct 2026, 9:55pm · Sample data · Made with Python (python-pptx)</a:t>
             </a:r>
           </a:p>
         </p:txBody>
